--- a/public/template-modelo2.pptx
+++ b/public/template-modelo2.pptx
@@ -3080,7 +3080,7 @@
 </file>
 
 <file path=ppt/slides/slide1.xml><?xml version="1.0" encoding="utf-8"?>
-<p:sld xmlns:a="http://schemas.openxmlformats.org/drawingml/2006/main" xmlns:p="http://schemas.openxmlformats.org/presentationml/2006/main" xmlns:r="http://schemas.openxmlformats.org/officeDocument/2006/relationships">
+<p:sld xmlns:a="http://schemas.openxmlformats.org/drawingml/2006/main" xmlns:r="http://schemas.openxmlformats.org/officeDocument/2006/relationships" xmlns:p="http://schemas.openxmlformats.org/presentationml/2006/main">
   <p:cSld>
     <p:spTree>
       <p:nvGrpSpPr>
@@ -3088,136 +3088,18 @@
         <p:cNvGrpSpPr/>
         <p:nvPr/>
       </p:nvGrpSpPr>
-      <p:grpSpPr/>
-      <p:sp>
-        <p:nvSpPr>
-          <p:cNvPr id="11" name="TextBox 10"/>
-          <p:cNvSpPr txBox="1"/>
-          <p:nvPr/>
-        </p:nvSpPr>
-        <p:spPr>
-          <a:xfrm>
-            <a:off x="5440680" y="5989320"/>
-            <a:ext cx="2103120" cy="1005840"/>
-          </a:xfrm>
-          <a:prstGeom prst="rect">
-            <a:avLst/>
-          </a:prstGeom>
-          <a:noFill/>
-        </p:spPr>
-        <p:txBody>
-          <a:bodyPr wrap="square">
-            <a:spAutoFit/>
-          </a:bodyPr>
-          <a:lstStyle/>
-          <a:p>
-            <a:pPr algn="ctr">
-              <a:defRPr sz="800">
-                <a:solidFill>
-                  <a:srgbClr val="1E293B"/>
-                </a:solidFill>
-                <a:latin typeface="Arial"/>
-              </a:defRPr>
-            </a:pPr>
-            <a:r>
-              <a:t>ALUNO</a:t>
-            </a:r>
-            <a:br/>
-            <a:r>
-              <a:t>{{NOME_ALUNO}}</a:t>
-            </a:r>
-          </a:p>
-        </p:txBody>
-      </p:sp>
+      <p:grpSpPr>
+        <a:xfrm>
+          <a:off x="0" y="0"/>
+          <a:ext cx="0" cy="0"/>
+          <a:chOff x="0" y="0"/>
+          <a:chExt cx="0" cy="0"/>
+        </a:xfrm>
+      </p:grpSpPr>
+      <!-- Background Image -->
       <p:pic>
         <p:nvPicPr>
-          <p:cNvPr id="12" name="Picture 11" descr="m2_sig_eider.png"/>
-          <p:cNvPicPr>
-            <a:picLocks noChangeAspect="1"/>
-          </p:cNvPicPr>
-          <p:nvPr/>
-        </p:nvPicPr>
-        <p:blipFill>
-          <a:blip r:embed="rId6"/>
-          <a:stretch>
-            <a:fillRect/>
-          </a:stretch>
-        </p:blipFill>
-        <p:spPr>
-          <a:xfrm>
-            <a:off x="8001000" y="5440680"/>
-            <a:ext cx="1188720" cy="502920"/>
-          </a:xfrm>
-          <a:prstGeom prst="rect">
-            <a:avLst/>
-          </a:prstGeom>
-        </p:spPr>
-      </p:pic>
-      <p:sp>
-        <p:nvSpPr>
-          <p:cNvPr id="13" name="TextBox 12"/>
-          <p:cNvSpPr txBox="1"/>
-          <p:nvPr/>
-        </p:nvSpPr>
-        <p:spPr>
-          <a:xfrm>
-            <a:off x="7543800" y="5989320"/>
-            <a:ext cx="2103120" cy="1005840"/>
-          </a:xfrm>
-          <a:prstGeom prst="rect">
-            <a:avLst/>
-          </a:prstGeom>
-          <a:noFill/>
-        </p:spPr>
-        <p:txBody>
-          <a:bodyPr wrap="square">
-            <a:spAutoFit/>
-          </a:bodyPr>
-          <a:lstStyle/>
-          <a:p>
-            <a:pPr algn="ctr">
-              <a:defRPr sz="800">
-                <a:solidFill>
-                  <a:srgbClr val="1E293B"/>
-                </a:solidFill>
-                <a:latin typeface="Arial"/>
-              </a:defRPr>
-            </a:pPr>
-            <a:r>
-              <a:t>INSTRUTOR</a:t>
-            </a:r>
-            <a:br/>
-            <a:r>
-              <a:t>{{INSTRUTOR}}</a:t>
-            </a:r>
-            <a:br/>
-            <a:r>
-              <a:t>{{REGISTRO_INSTRUTOR}}</a:t>
-            </a:r>
-          </a:p>
-        </p:txBody>
-      </p:sp>
-    </p:spTree>
-  </p:cSld>
-  <p:clrMapOvr>
-    <a:masterClrMapping/>
-  </p:clrMapOvr>
-</p:sld>
-</file>
-
-<file path=ppt/slides/slide2.xml><?xml version="1.0" encoding="utf-8"?>
-<p:sld xmlns:a="http://schemas.openxmlformats.org/drawingml/2006/main" xmlns:p="http://schemas.openxmlformats.org/presentationml/2006/main" xmlns:r="http://schemas.openxmlformats.org/officeDocument/2006/relationships">
-  <p:cSld>
-    <p:spTree>
-      <p:nvGrpSpPr>
-        <p:cNvPr id="1" name=""/>
-        <p:cNvGrpSpPr/>
-        <p:nvPr/>
-      </p:nvGrpSpPr>
-      <p:grpSpPr/>
-      <p:pic>
-        <p:nvPicPr>
-          <p:cNvPr id="2" name="Picture 1" descr="m2_verso_bg.png"/>
+          <p:cNvPr id="2" name="Background"/>
           <p:cNvPicPr>
             <a:picLocks noChangeAspect="1"/>
           </p:cNvPicPr>
@@ -3239,16 +3121,17 @@
           </a:prstGeom>
         </p:spPr>
       </p:pic>
-      <p:sp>
-        <p:nvSpPr>
-          <p:cNvPr id="3" name="TextBox 2"/>
+      <!-- Center Text Box (Header & Narrative) -->
+      <p:sp>
+        <p:nvSpPr>
+          <p:cNvPr id="3" name="Certificado Header e Corpo"/>
           <p:cNvSpPr txBox="1"/>
           <p:nvPr/>
         </p:nvSpPr>
         <p:spPr>
           <a:xfrm>
-            <a:off x="1097280" y="777240"/>
-            <a:ext cx="8494776" cy="731520"/>
+            <a:off x="1068934" y="600000"/>
+            <a:ext cx="8551468" cy="4500000"/>
           </a:xfrm>
           <a:prstGeom prst="rect">
             <a:avLst/>
@@ -3256,48 +3139,517 @@
           <a:noFill/>
         </p:spPr>
         <p:txBody>
-          <a:bodyPr wrap="none">
-            <a:spAutoFit/>
-          </a:bodyPr>
-          <a:lstStyle/>
-          <a:p>
-            <a:pPr>
-              <a:defRPr sz="1300" b="1">
-                <a:solidFill>
-                  <a:srgbClr val="1E293B"/>
-                </a:solidFill>
-                <a:latin typeface="Arial"/>
-              </a:defRPr>
+          <a:bodyPr vert="horz" lIns="0" tIns="0" rIns="0" bIns="0" anchor="t"/>
+          <a:lstStyle/>
+          <!-- 1. TITULO PRINCIPAL: Montserrat Bold #595959 -->
+          <a:p>
+            <a:pPr algn="ctr"/>
+            <a:r>
+              <a:rPr lang="pt-BR" sz="2600" b="1" spc="150">
+                <a:solidFill>
+                  <a:srgbClr val="595959"/>
+                </a:solidFill>
+                <a:latin typeface="Montserrat"/>
+                <a:cs typeface="Montserrat"/>
+              </a:rPr>
+              <a:t>CERTIFICADO DE CAPACITAÇÃO</a:t>
+            </a:r>
+          </a:p>
+          <!-- 2. SUBTITULO: Lato Regular #000000 -->
+          <a:p>
+            <a:pPr algn="ctr">
+              <a:spcBfr>
+                <a:spcPts val="600"/>
+              </a:spcBfr>
             </a:pPr>
             <a:r>
-              <a:t>Programa: {{CURSO}}</a:t>
-            </a:r>
-          </a:p>
-          <a:p>
-            <a:pPr>
-              <a:defRPr sz="1100">
-                <a:solidFill>
-                  <a:srgbClr val="64748B"/>
-                </a:solidFill>
-                <a:latin typeface="Arial"/>
-              </a:defRPr>
+              <a:rPr lang="pt-BR" sz="1500" b="0">
+                <a:solidFill>
+                  <a:srgbClr val="000000"/>
+                </a:solidFill>
+                <a:latin typeface="Lato"/>
+                <a:cs typeface="Lato"/>
+              </a:rPr>
+              <a:t>A ECOSAFETY certifica que:</a:t>
+            </a:r>
+          </a:p>
+          <!-- 3. NOME DO ALUNO: Lato Black #3340E6 (Azul Real) -->
+          <a:p>
+            <a:pPr algn="ctr">
+              <a:spcBfr>
+                <a:spcPts val="700"/>
+              </a:spcBfr>
             </a:pPr>
             <a:r>
-              <a:t>Carga horária: {{CARGA_HORARIA}}</a:t>
-            </a:r>
-          </a:p>
-        </p:txBody>
-      </p:sp>
-      <p:sp>
-        <p:nvSpPr>
-          <p:cNvPr id="4" name="TextBox 3"/>
+              <a:rPr lang="pt-BR" sz="2200" b="1" spc="50">
+                <a:solidFill>
+                  <a:srgbClr val="3340E6"/>
+                </a:solidFill>
+                <a:latin typeface="Lato"/>
+                <a:cs typeface="Lato"/>
+              </a:rPr>
+              <a:t>{{NOME_ALUNO}}</a:t>
+            </a:r>
+          </a:p>
+          <!-- 4. TEXTO DE CONCLUSAO: Lato Regular #000000 -->
+          <a:p>
+            <a:pPr algn="ctr">
+              <a:spcBfr>
+                <a:spcPts val="500"/>
+              </a:spcBfr>
+            </a:pPr>
+            <a:r>
+              <a:rPr lang="pt-BR" sz="1200" b="0">
+                <a:solidFill>
+                  <a:srgbClr val="000000"/>
+                </a:solidFill>
+                <a:latin typeface="Lato"/>
+              </a:rPr>
+              <a:t>Portador do CPF: {{CPF}}, completou com aprovação no período de {{DATA}} na ECOSAFETY TREINAMENTOS, o treinamento de:</a:t>
+            </a:r>
+          </a:p>
+          <!-- 5. NOME DO CURSO: Lato Bold #3340E6 -->
+          <a:p>
+            <a:pPr algn="ctr">
+              <a:spcBfr>
+                <a:spcPts val="600"/>
+              </a:spcBfr>
+            </a:pPr>
+            <a:r>
+              <a:rPr lang="pt-BR" sz="1600" b="1">
+                <a:solidFill>
+                  <a:srgbClr val="3340E6"/>
+                </a:solidFill>
+                <a:latin typeface="Lato"/>
+              </a:rPr>
+              <a:t>{{CURSO}}</a:t>
+            </a:r>
+          </a:p>
+          <!-- 6. DESCRICAO / APROVEITAMENTO: Lato Regular #000000 -->
+          <a:p>
+            <a:pPr algn="just">
+              <a:spcBfr>
+                <a:spcPts val="450"/>
+              </a:spcBfr>
+            </a:pPr>
+            <a:r>
+              <a:rPr lang="pt-BR" sz="1050" b="0">
+                <a:solidFill>
+                  <a:srgbClr val="000000"/>
+                </a:solidFill>
+                <a:latin typeface="Lato"/>
+              </a:rPr>
+              <a:t>{{DESCRICAO}}</a:t>
+            </a:r>
+          </a:p>
+          <!-- 7. LOCAL E DATA: Lato Regular #000000 -->
+          <a:p>
+            <a:pPr algn="ctr">
+              <a:spcBfr>
+                <a:spcPts val="500"/>
+              </a:spcBfr>
+            </a:pPr>
+            <a:r>
+              <a:rPr lang="pt-BR" sz="1150" b="0">
+                <a:solidFill>
+                  <a:srgbClr val="000000"/>
+                </a:solidFill>
+                <a:latin typeface="Lato"/>
+              </a:rPr>
+              <a:t>{{LOCAL}}, Brasil, {{DATA}}.</a:t>
+            </a:r>
+          </a:p>
+        </p:txBody>
+      </p:sp>
+      <!-- ================= ASSINATURAS (4 COLUNAS) ================= -->
+      <!-- 1. Raimundo (Assinatura rId3) -->
+      <p:pic>
+        <p:nvPicPr>
+          <p:cNvPr id="4" name="Sig Raimundo"/>
+          <p:cNvPicPr>
+            <a:picLocks noChangeAspect="1"/>
+          </p:cNvPicPr>
+          <p:nvPr/>
+        </p:nvPicPr>
+        <p:blipFill>
+          <a:blip r:embed="rId3"/>
+          <a:stretch>
+            <a:fillRect/>
+          </a:stretch>
+        </p:blipFill>
+        <p:spPr>
+          <a:xfrm>
+            <a:off x="1450000" y="5250000"/>
+            <a:ext cx="1200000" cy="500000"/>
+          </a:xfrm>
+          <a:prstGeom prst="rect">
+            <a:avLst/>
+          </a:prstGeom>
+        </p:spPr>
+      </p:pic>
+      <!-- Raimundo Traço e Texto -->
+      <p:sp>
+        <p:nvSpPr>
+          <p:cNvPr id="5" name="Linha Raimundo"/>
+          <p:cNvSpPr/>
+          <p:nvPr/>
+        </p:nvSpPr>
+        <p:spPr>
+          <a:xfrm>
+            <a:off x="1094668" y="5750000"/>
+            <a:ext cx="1950000" cy="1200000"/>
+          </a:xfrm>
+          <a:prstGeom prst="rect">
+            <a:avLst/>
+          </a:prstGeom>
+          <a:noFill/>
+          <a:ln w="12700">
+            <a:solidFill>
+              <a:srgbClr val="000000"/>
+            </a:solidFill>
+          </a:ln>
+        </p:spPr>
+        <p:txBody>
+          <a:bodyPr vert="horz" lIns="0" tIns="50000" rIns="0" bIns="0" anchor="t"/>
+          <a:lstStyle/>
+          <a:p>
+            <a:pPr algn="ctr"/>
+            <a:r>
+              <a:rPr lang="pt-BR" sz="800" b="1">
+                <a:solidFill>
+                  <a:srgbClr val="000000"/>
+                </a:solidFill>
+                <a:latin typeface="Lato"/>
+              </a:rPr>
+              <a:t>RESPONSAVEL TÉCNICO</a:t>
+            </a:r>
+          </a:p>
+          <a:p>
+            <a:pPr algn="ctr"/>
+            <a:r>
+              <a:rPr lang="pt-BR" sz="750" b="0">
+                <a:solidFill>
+                  <a:srgbClr val="000000"/>
+                </a:solidFill>
+                <a:latin typeface="Lato"/>
+              </a:rPr>
+              <a:t>Raimundo Fernandes de Oliveira Junior</a:t>
+            </a:r>
+          </a:p>
+          <a:p>
+            <a:pPr algn="ctr"/>
+            <a:r>
+              <a:rPr lang="pt-BR" sz="700" b="0">
+                <a:solidFill>
+                  <a:srgbClr val="000000"/>
+                </a:solidFill>
+                <a:latin typeface="Lato"/>
+              </a:rPr>
+              <a:t>Registro CREA – 211204597-0</a:t>
+            </a:r>
+          </a:p>
+        </p:txBody>
+      </p:sp>
+      <!-- 2. Cezar Augusto (Assinatura rId4) -->
+      <p:pic>
+        <p:nvPicPr>
+          <p:cNvPr id="6" name="Sig Cezar"/>
+          <p:cNvPicPr>
+            <a:picLocks noChangeAspect="1"/>
+          </p:cNvPicPr>
+          <p:nvPr/>
+        </p:nvPicPr>
+        <p:blipFill>
+          <a:blip r:embed="rId4"/>
+          <a:stretch>
+            <a:fillRect/>
+          </a:stretch>
+        </p:blipFill>
+        <p:spPr>
+          <a:xfrm>
+            <a:off x="3650000" y="5250000"/>
+            <a:ext cx="1200000" cy="500000"/>
+          </a:xfrm>
+          <a:prstGeom prst="rect">
+            <a:avLst/>
+          </a:prstGeom>
+        </p:spPr>
+      </p:pic>
+      <!-- Cezar Traço e Texto -->
+      <p:sp>
+        <p:nvSpPr>
+          <p:cNvPr id="7" name="Linha Cezar"/>
+          <p:cNvSpPr/>
+          <p:nvPr/>
+        </p:nvSpPr>
+        <p:spPr>
+          <a:xfrm>
+            <a:off x="3294668" y="5750000"/>
+            <a:ext cx="1950000" cy="1200000"/>
+          </a:xfrm>
+          <a:prstGeom prst="rect">
+            <a:avLst/>
+          </a:prstGeom>
+          <a:noFill/>
+          <a:ln w="12700">
+            <a:solidFill>
+              <a:srgbClr val="000000"/>
+            </a:solidFill>
+          </a:ln>
+        </p:spPr>
+        <p:txBody>
+          <a:bodyPr vert="horz" lIns="0" tIns="50000" rIns="0" bIns="0" anchor="t"/>
+          <a:lstStyle/>
+          <a:p>
+            <a:pPr algn="ctr"/>
+            <a:r>
+              <a:rPr lang="pt-BR" sz="750" b="1">
+                <a:solidFill>
+                  <a:srgbClr val="000000"/>
+                </a:solidFill>
+                <a:latin typeface="Lato"/>
+              </a:rPr>
+              <a:t>RESPONSAVEL TÉCNICO / INSTRUTOR</a:t>
+            </a:r>
+          </a:p>
+          <a:p>
+            <a:pPr algn="ctr"/>
+            <a:r>
+              <a:rPr lang="pt-BR" sz="700" b="0">
+                <a:solidFill>
+                  <a:srgbClr val="000000"/>
+                </a:solidFill>
+                <a:latin typeface="Lato"/>
+              </a:rPr>
+              <a:t>Engenheiro Eletricista</a:t>
+            </a:r>
+          </a:p>
+          <a:p>
+            <a:pPr algn="ctr"/>
+            <a:r>
+              <a:rPr lang="pt-BR" sz="700" b="0">
+                <a:solidFill>
+                  <a:srgbClr val="000000"/>
+                </a:solidFill>
+                <a:latin typeface="Lato"/>
+              </a:rPr>
+              <a:t>Cezar Augusto Galvão De P. Camêlo</a:t>
+            </a:r>
+          </a:p>
+          <a:p>
+            <a:pPr algn="ctr"/>
+            <a:r>
+              <a:rPr lang="pt-BR" sz="700" b="0">
+                <a:solidFill>
+                  <a:srgbClr val="000000"/>
+                </a:solidFill>
+                <a:latin typeface="Lato"/>
+              </a:rPr>
+              <a:t>CREA-RN 211051104-4</a:t>
+            </a:r>
+          </a:p>
+        </p:txBody>
+      </p:sp>
+      <!-- 3. ALUNO (PENDENTE: SEM IMAGEM, LINHA LIVRE) -->
+      <p:sp>
+        <p:nvSpPr>
+          <p:cNvPr id="8" name="Linha Aluno"/>
+          <p:cNvSpPr/>
+          <p:nvPr/>
+        </p:nvSpPr>
+        <p:spPr>
+          <a:xfrm>
+            <a:off x="5494668" y="5750000"/>
+            <a:ext cx="1950000" cy="1200000"/>
+          </a:xfrm>
+          <a:prstGeom prst="rect">
+            <a:avLst/>
+          </a:prstGeom>
+          <a:noFill/>
+          <a:ln w="12700">
+            <a:solidFill>
+              <a:srgbClr val="000000"/>
+            </a:solidFill>
+          </a:ln>
+        </p:spPr>
+        <p:txBody>
+          <a:bodyPr vert="horz" lIns="0" tIns="50000" rIns="0" bIns="0" anchor="t"/>
+          <a:lstStyle/>
+          <a:p>
+            <a:pPr algn="ctr"/>
+            <a:r>
+              <a:rPr lang="pt-BR" sz="800" b="1">
+                <a:solidFill>
+                  <a:srgbClr val="000000"/>
+                </a:solidFill>
+                <a:latin typeface="Lato"/>
+              </a:rPr>
+              <a:t>ALUNO</a:t>
+            </a:r>
+          </a:p>
+          <a:p>
+            <a:pPr algn="ctr"/>
+            <a:r>
+              <a:rPr lang="pt-BR" sz="780" b="1">
+                <a:solidFill>
+                  <a:srgbClr val="3340E6"/>
+                </a:solidFill>
+                <a:latin typeface="Lato"/>
+              </a:rPr>
+              <a:t>{{NOME_ALUNO}}</a:t>
+            </a:r>
+          </a:p>
+        </p:txBody>
+      </p:sp>
+      <!-- 4. INSTRUTOR (Assinatura rId6) -->
+      <p:pic>
+        <p:nvPicPr>
+          <p:cNvPr id="9" name="Sig Instrutor"/>
+          <p:cNvPicPr>
+            <a:picLocks noChangeAspect="1"/>
+          </p:cNvPicPr>
+          <p:nvPr/>
+        </p:nvPicPr>
+        <p:blipFill>
+          <a:blip r:embed="rId6"/>
+          <a:stretch>
+            <a:fillRect/>
+          </a:stretch>
+        </p:blipFill>
+        <p:spPr>
+          <a:xfrm>
+            <a:off x="8050000" y="5250000"/>
+            <a:ext cx="1200000" cy="500000"/>
+          </a:xfrm>
+          <a:prstGeom prst="rect">
+            <a:avLst/>
+          </a:prstGeom>
+        </p:spPr>
+      </p:pic>
+      <!-- Instrutor Traço e Texto -->
+      <p:sp>
+        <p:nvSpPr>
+          <p:cNvPr id="10" name="Linha Instrutor"/>
+          <p:cNvSpPr/>
+          <p:nvPr/>
+        </p:nvSpPr>
+        <p:spPr>
+          <a:xfrm>
+            <a:off x="7694668" y="5750000"/>
+            <a:ext cx="1950000" cy="1200000"/>
+          </a:xfrm>
+          <a:prstGeom prst="rect">
+            <a:avLst/>
+          </a:prstGeom>
+          <a:noFill/>
+          <a:ln w="12700">
+            <a:solidFill>
+              <a:srgbClr val="000000"/>
+            </a:solidFill>
+          </a:ln>
+        </p:spPr>
+        <p:txBody>
+          <a:bodyPr vert="horz" lIns="0" tIns="50000" rIns="0" bIns="0" anchor="t"/>
+          <a:lstStyle/>
+          <a:p>
+            <a:pPr algn="ctr"/>
+            <a:r>
+              <a:rPr lang="pt-BR" sz="800" b="1">
+                <a:solidFill>
+                  <a:srgbClr val="000000"/>
+                </a:solidFill>
+                <a:latin typeface="Lato"/>
+              </a:rPr>
+              <a:t>INSTRUTOR</a:t>
+            </a:r>
+          </a:p>
+          <a:p>
+            <a:pPr algn="ctr"/>
+            <a:r>
+              <a:rPr lang="pt-BR" sz="750" b="0">
+                <a:solidFill>
+                  <a:srgbClr val="000000"/>
+                </a:solidFill>
+                <a:latin typeface="Lato"/>
+              </a:rPr>
+              <a:t>{{INSTRUTOR}}</a:t>
+            </a:r>
+          </a:p>
+          <a:p>
+            <a:pPr algn="ctr"/>
+            <a:r>
+              <a:rPr lang="pt-BR" sz="700" b="0">
+                <a:solidFill>
+                  <a:srgbClr val="000000"/>
+                </a:solidFill>
+                <a:latin typeface="Lato"/>
+              </a:rPr>
+              <a:t>{{REGISTRO_INSTRUTOR}}</a:t>
+            </a:r>
+          </a:p>
+        </p:txBody>
+      </p:sp>
+    </p:spTree>
+  </p:cSld>
+  <p:clrMapOvr>
+    <a:masterClrMapping/>
+  </p:clrMapOvr>
+</p:sld>
+</file>
+
+<file path=ppt/slides/slide2.xml><?xml version="1.0" encoding="utf-8"?>
+<p:sld xmlns:a="http://schemas.openxmlformats.org/drawingml/2006/main" xmlns:r="http://schemas.openxmlformats.org/officeDocument/2006/relationships" xmlns:p="http://schemas.openxmlformats.org/presentationml/2006/main">
+  <p:cSld>
+    <p:spTree>
+      <p:nvGrpSpPr>
+        <p:cNvPr id="1" name=""/>
+        <p:cNvGrpSpPr/>
+        <p:nvPr/>
+      </p:nvGrpSpPr>
+      <p:grpSpPr>
+        <a:xfrm>
+          <a:off x="0" y="0"/>
+          <a:ext cx="0" cy="0"/>
+          <a:chOff x="0" y="0"/>
+          <a:chExt cx="0" cy="0"/>
+        </a:xfrm>
+      </p:grpSpPr>
+      <!-- Background Image -->
+      <p:pic>
+        <p:nvPicPr>
+          <p:cNvPr id="2" name="Background Verso"/>
+          <p:cNvPicPr>
+            <a:picLocks noChangeAspect="1"/>
+          </p:cNvPicPr>
+          <p:nvPr/>
+        </p:nvPicPr>
+        <p:blipFill>
+          <a:blip r:embed="rId2"/>
+          <a:stretch>
+            <a:fillRect/>
+          </a:stretch>
+        </p:blipFill>
+        <p:spPr>
+          <a:xfrm>
+            <a:off x="0" y="0"/>
+            <a:ext cx="10689336" cy="7562088"/>
+          </a:xfrm>
+          <a:prstGeom prst="rect">
+            <a:avLst/>
+          </a:prstGeom>
+        </p:spPr>
+      </p:pic>
+      <!-- Header Programa e Carga Horaria -->
+      <p:sp>
+        <p:nvSpPr>
+          <p:cNvPr id="3" name="Programa Header"/>
           <p:cNvSpPr txBox="1"/>
           <p:nvPr/>
         </p:nvSpPr>
         <p:spPr>
           <a:xfrm>
-            <a:off x="1097280" y="1600200"/>
-            <a:ext cx="4114800" cy="4389120"/>
+            <a:off x="1100000" y="600000"/>
+            <a:ext cx="8500000" cy="800000"/>
           </a:xfrm>
           <a:prstGeom prst="rect">
             <a:avLst/>
@@ -3305,38 +3657,52 @@
           <a:noFill/>
         </p:spPr>
         <p:txBody>
-          <a:bodyPr wrap="square">
-            <a:spAutoFit/>
-          </a:bodyPr>
-          <a:lstStyle/>
-          <a:p>
-            <a:pPr>
-              <a:lnSpc>
-                <a:spcPct val="125000"/>
-              </a:lnSpc>
-              <a:defRPr sz="900">
-                <a:solidFill>
-                  <a:srgbClr val="0F172A"/>
-                </a:solidFill>
-                <a:latin typeface="Arial"/>
-              </a:defRPr>
-            </a:pPr>
-            <a:r>
-              <a:t>{{CONTEUDO_COL1}}</a:t>
-            </a:r>
-          </a:p>
-        </p:txBody>
-      </p:sp>
-      <p:sp>
-        <p:nvSpPr>
-          <p:cNvPr id="5" name="TextBox 4"/>
+          <a:bodyPr vert="horz" lIns="0" tIns="0" rIns="0" bIns="0"/>
+          <a:lstStyle/>
+          <a:p>
+            <a:r>
+              <a:rPr lang="pt-BR" sz="1400" b="0">
+                <a:solidFill>
+                  <a:srgbClr val="595959"/>
+                </a:solidFill>
+                <a:latin typeface="Calibri"/>
+              </a:rPr>
+              <a:t>Programa: </a:t>
+            </a:r>
+            <a:r>
+              <a:rPr lang="pt-BR" sz="1400" b="1">
+                <a:solidFill>
+                  <a:srgbClr val="3340E6"/>
+                </a:solidFill>
+                <a:latin typeface="Calibri"/>
+              </a:rPr>
+              <a:t>{{CURSO}}</a:t>
+            </a:r>
+          </a:p>
+          <a:p>
+            <a:r>
+              <a:rPr lang="pt-BR" sz="1200" b="0">
+                <a:solidFill>
+                  <a:srgbClr val="595959"/>
+                </a:solidFill>
+                <a:latin typeface="Calibri"/>
+              </a:rPr>
+              <a:t>Carga horária: {{CARGA_HORARIA}}</a:t>
+            </a:r>
+          </a:p>
+        </p:txBody>
+      </p:sp>
+      <!-- Coluna 1 do Conteudo Programatico -->
+      <p:sp>
+        <p:nvSpPr>
+          <p:cNvPr id="4" name="Conteudo Coluna 1"/>
           <p:cNvSpPr txBox="1"/>
           <p:nvPr/>
         </p:nvSpPr>
         <p:spPr>
           <a:xfrm>
-            <a:off x="5486400" y="1600200"/>
-            <a:ext cx="4114800" cy="4389120"/>
+            <a:off x="1100000" y="1500000"/>
+            <a:ext cx="4000000" cy="5100000"/>
           </a:xfrm>
           <a:prstGeom prst="rect">
             <a:avLst/>
@@ -3344,38 +3710,32 @@
           <a:noFill/>
         </p:spPr>
         <p:txBody>
-          <a:bodyPr wrap="square">
-            <a:spAutoFit/>
-          </a:bodyPr>
-          <a:lstStyle/>
-          <a:p>
-            <a:pPr>
-              <a:lnSpc>
-                <a:spcPct val="125000"/>
-              </a:lnSpc>
-              <a:defRPr sz="900">
-                <a:solidFill>
-                  <a:srgbClr val="0F172A"/>
-                </a:solidFill>
-                <a:latin typeface="Arial"/>
-              </a:defRPr>
-            </a:pPr>
-            <a:r>
-              <a:t>{{CONTEUDO_COL2}}</a:t>
-            </a:r>
-          </a:p>
-        </p:txBody>
-      </p:sp>
-      <p:sp>
-        <p:nvSpPr>
-          <p:cNvPr id="6" name="TextBox 5"/>
+          <a:bodyPr vert="horz" lIns="0" tIns="0" rIns="0" bIns="0"/>
+          <a:lstStyle/>
+          <a:p>
+            <a:r>
+              <a:rPr lang="pt-BR" sz="950" b="0">
+                <a:solidFill>
+                  <a:srgbClr val="000000"/>
+                </a:solidFill>
+                <a:latin typeface="Times New Roman"/>
+              </a:rPr>
+              <a:t>{{CONTEUDO_COL1}}</a:t>
+            </a:r>
+          </a:p>
+        </p:txBody>
+      </p:sp>
+      <!-- Coluna 2 do Conteudo Programatico -->
+      <p:sp>
+        <p:nvSpPr>
+          <p:cNvPr id="5" name="Conteudo Coluna 2"/>
           <p:cNvSpPr txBox="1"/>
           <p:nvPr/>
         </p:nvSpPr>
         <p:spPr>
           <a:xfrm>
-            <a:off x="1097280" y="6309360"/>
-            <a:ext cx="8494776" cy="822960"/>
+            <a:off x="5400000" y="1500000"/>
+            <a:ext cx="4200000" cy="5100000"/>
           </a:xfrm>
           <a:prstGeom prst="rect">
             <a:avLst/>
@@ -3383,29 +3743,60 @@
           <a:noFill/>
         </p:spPr>
         <p:txBody>
-          <a:bodyPr wrap="none">
-            <a:spAutoFit/>
-          </a:bodyPr>
-          <a:lstStyle/>
-          <a:p>
-            <a:pPr algn="ctr">
-              <a:defRPr sz="900" b="1">
-                <a:solidFill>
-                  <a:srgbClr val="64748B"/>
-                </a:solidFill>
-                <a:latin typeface="Arial"/>
-              </a:defRPr>
-            </a:pPr>
-            <a:r>
+          <a:bodyPr vert="horz" lIns="0" tIns="0" rIns="0" bIns="0"/>
+          <a:lstStyle/>
+          <a:p>
+            <a:r>
+              <a:rPr lang="pt-BR" sz="950" b="0">
+                <a:solidFill>
+                  <a:srgbClr val="000000"/>
+                </a:solidFill>
+                <a:latin typeface="Times New Roman"/>
+              </a:rPr>
+              <a:t>{{CONTEUDO_COL2}}</a:t>
+            </a:r>
+          </a:p>
+        </p:txBody>
+      </p:sp>
+      <!-- Rodape Validade Oficial -->
+      <p:sp>
+        <p:nvSpPr>
+          <p:cNvPr id="6" name="Rodape Validade"/>
+          <p:cNvSpPr txBox="1"/>
+          <p:nvPr/>
+        </p:nvSpPr>
+        <p:spPr>
+          <a:xfrm>
+            <a:off x="1100000" y="6850000"/>
+            <a:ext cx="8500000" cy="400000"/>
+          </a:xfrm>
+          <a:prstGeom prst="rect">
+            <a:avLst/>
+          </a:prstGeom>
+          <a:noFill/>
+        </p:spPr>
+        <p:txBody>
+          <a:bodyPr vert="horz" lIns="0" tIns="0" rIns="0" bIns="0"/>
+          <a:lstStyle/>
+          <a:p>
+            <a:pPr algn="ctr"/>
+            <a:r>
+              <a:rPr lang="pt-BR" sz="1000" b="1">
+                <a:solidFill>
+                  <a:srgbClr val="595959"/>
+                </a:solidFill>
+                <a:latin typeface="Calibri"/>
+              </a:rPr>
               <a:t>ECOSAFETY</a:t>
             </a:r>
-            <a:br/>
-            <a:r>
-              <a:t>CNPJ 50.710.500/0001-95</a:t>
-            </a:r>
-            <a:br/>
-            <a:r>
-              <a:t>ESSE TREINAMENTO TEM VALIDADE DE {{VALIDADE}}</a:t>
+            <a:r>
+              <a:rPr lang="pt-BR" sz="1000" b="0">
+                <a:solidFill>
+                  <a:srgbClr val="595959"/>
+                </a:solidFill>
+                <a:latin typeface="Calibri"/>
+              </a:rPr>
+              <a:t> • CNPJ 50.710.500/0001-95 • ESSE TREINAMENTO TEM VALIDADE DE {{VALIDADE}}</a:t>
             </a:r>
           </a:p>
         </p:txBody>

--- a/public/template-modelo2.pptx
+++ b/public/template-modelo2.pptx
@@ -3130,7 +3130,7 @@
         </p:nvSpPr>
         <p:spPr>
           <a:xfrm>
-            <a:off x="1068934" y="600000"/>
+            <a:off x="1068934" y="1100000"/>
             <a:ext cx="8551468" cy="4500000"/>
           </a:xfrm>
           <a:prstGeom prst="rect">
